--- a/library/seminars/sem-06/rendered/sem-06-n3.pptx
+++ b/library/seminars/sem-06/rendered/sem-06-n3.pptx
@@ -572,7 +572,7 @@
           <a:p/>
           <a:p>
             <a:r>
-              <a:t>Если спросят, нельзя ли просто вычистить чужие серверы из проектного файла: можно, но это решение за команду, а не за одного человека — коллеге они нужны ровно так же, как вам трекер. Личная область решает то же самое, никому ничего не ломая.</a:t>
+              <a:t>Если спросят, нельзя ли просто вычистить чужие серверы из проектного файла: можно, но это решение команды: коллеге они нужны ровно так же, как вам трекер. Личная область решает то же самое, никому ничего не ломая.</a:t>
             </a:r>
           </a:p>
           <a:p/>
@@ -1113,7 +1113,7 @@
           <a:p/>
           <a:p>
             <a:r>
-              <a:t>Третий: команда сократила свой набор встроенных инструментов с сорока до тринадцати и замерила прирост — два-пять процентных пунктов.</a:t>
+              <a:t>Третий: команда сократила свой набор встроенных инструментов с сорока до тринадцати основных и замерила прирост — два-пять процентных пунктов.</a:t>
             </a:r>
           </a:p>
           <a:p/>
@@ -1156,7 +1156,7 @@
           <a:p/>
           <a:p>
             <a:r>
-              <a:t>Если спросят, почему предел тридцать-пятьдесят инструментов важнее цены: потому что это уже не про деньги. Переполнение контекста стоит токенов, а падение точности выбора означает, что агент берёт неподходящий инструмент — и это заметно по результату, а не по счёту.</a:t>
+              <a:t>Если спросят, почему предел тридцать-пятьдесят инструментов важнее цены: потому что это уже не про деньги. Переполнение контекста стоит токенов, а падение точности выбора означает, что агент берёт неподходящий инструмент — и это заметно по результату, счёт тут молчит.</a:t>
             </a:r>
           </a:p>
           <a:p/>
@@ -1250,7 +1250,7 @@
           <a:p/>
           <a:p>
             <a:r>
-              <a:t>И четвёртое, важнее остальных. Считать, что большой контекст снимает вопрос, не стоит: точность выбора инструмента падает, когда доступных больше тридцати-пятидесяти. Переполнение стоит токенов, а это стоит неподходящего инструмента — и видно по результату, а не по счёту.</a:t>
+              <a:t>И четвёртое, важнее остальных. Считать, что большой контекст снимает вопрос, не стоит: точность выбора инструмента падает, когда доступных больше тридцати-пятидесяти. Переполнение стоит токенов, а это стоит неподходящего инструмента — и видно по результату, где счёт молчит.</a:t>
             </a:r>
           </a:p>
           <a:p/>
@@ -1287,7 +1287,7 @@
           <a:p/>
           <a:p>
             <a:r>
-              <a:t>Если спросят, чем кончилось у разработчика: два флага сняты, свои серверы он перенёс в личную область, в проектном файле осталось то, что нужно всей команде. Сжатие на следующей длинной задаче пришло позже, и это единственное, что он замерил, — честно сказать так, а не называть процент.</a:t>
+              <a:t>Если спросят, чем кончилось у разработчика: два флага сняты, свои серверы он перенёс в личную область, в проектном файле осталось то, что нужно всей команде. Сжатие на следующей длинной задаче пришло позже, и это единственное, что он замерил, — так и стоит сказать, без выдуманного процента.</a:t>
             </a:r>
           </a:p>
           <a:p/>
@@ -1363,13 +1363,13 @@
           <a:lstStyle/>
           <a:p>
             <a:r>
-              <a:t>Доступ наружу у агента уже есть: сервер отдаёт ему то, чего в репозитории не было. Второй ход встречный. Часть работы уходит отдельному исполнителю со своим контекстом; делегировать так вы уже умеете, и это не стоит ни строчки настройки.</a:t>
+              <a:t>Доступ наружу у агента уже есть: сервер отдаёт ему то, чего в репозитории не было. Второй ход встречный: часть работы уходит отдельному исполнителю со своим контекстом, и стоит это ноль строчек настройки.</a:t>
             </a:r>
           </a:p>
           <a:p/>
           <a:p>
             <a:r>
-              <a:t>Первая развилка ступени — цена поиска, который нужен не сам по себе, а чтобы продолжить работу здесь же. Что с ней делать, я спрошу через несколько экранов. Догадку, которая придёт вам сейчас, запомните: мы её проверим.</a:t>
+              <a:t>Первая развилка ступени — цена поиска, который нужен, чтобы продолжить работу здесь же. Что с ней делать, спрошу через несколько экранов. Догадку, которая придёт вам сейчас, запомните: мы её проверим.</a:t>
             </a:r>
           </a:p>
           <a:p/>
@@ -1469,25 +1469,25 @@
           <a:lstStyle/>
           <a:p>
             <a:r>
-              <a:t>Одна вещь, которая нужна во всех трёх разборах этой ступени. И сразу разведём два слова, которые дальше всё время будут стоять рядом.</a:t>
+              <a:t>Сразу разведём два слова, которые дальше всё время стоят рядом.</a:t>
             </a:r>
           </a:p>
           <a:p/>
           <a:p>
             <a:r>
-              <a:t>Агент — это то, что работает в вашей сессии и с чем вы разговариваете. Роль, в документации её зовут субагентом, — отдельный исполнитель, которого агент зовёт под одну задачу. Агент один; ролей он может позвать сколько нужно.</a:t>
+              <a:t>Агент — то, что работает в вашей сессии и с чем вы разговариваете. Роль (в документации — субагент) — отдельный исполнитель, которого агент зовёт под одну задачу.</a:t>
             </a:r>
           </a:p>
           <a:p/>
           <a:p>
             <a:r>
-              <a:t>Верхний ярус — чем контекст занят к моменту, когда вы написали первую строку. Системная часть от харнесса: какие есть инструменты, как отвечать, что делать запрещено. Файлы инструкций проекта, всеми уровнями — от корня до папки. Описания всех подключённых серверов, целиком, до первого вашего вопроса. И четвёртое — разговор: задача, ответы агента и содержимое каждого прочитанного файла. Первые три вы не писали и не выбирали, четвёртое растёт с каждым открытым файлом. Отсюда и ответ, почему контекст кончается раньше, чем кажется по длине переписки.</a:t>
+              <a:t>Верхний ярус вы уже считали в прошлом блоке — те же четыре статьи. Системная часть от харнесса, файлы инструкций проекта, описания всех подключённых серверов целиком и четвёртое — разговор: задача, ответы агента и содержимое каждого прочитанного файла. Первые три вы не выбирали; четвёртое растёт с каждым открытым файлом. Здесь он нужен затем, чтобы сравнить два контекста.</a:t>
             </a:r>
           </a:p>
           <a:p/>
           <a:p>
             <a:r>
-              <a:t>Нижний ярус — кто этот контекст держит. Слева ваша рабочая сессия: здесь лежит правка, сюда же нужен результат чтения. В середине роль: контекст свой, те же три верхние полосы, а вместо разговора — одна задача текстом. Сорок файлов лягут туда и закроются вместе с ролью, обратно уйдёт только итог — сам, без вашего участия.</a:t>
+              <a:t>Нижний ярус — кто этот контекст держит. Слева ваша рабочая сессия: здесь лежит правка, сюда же нужен результат чтения. В середине роль: контекст свой, те же три верхние полосы, а вместо разговора — задача текстом. Сорок файлов лягут туда и закроются вместе с ролью, обратно уйдёт только итог — сам, без вашего участия.</a:t>
             </a:r>
           </a:p>
           <a:p/>
@@ -1499,12 +1499,24 @@
           <a:p/>
           <a:p>
             <a:r>
+              <a:t>Если спросят, сколько ролей можно позвать: агент один, ролей он зовёт столько, сколько нужно; предел — в кейсе параллелизма.</a:t>
+            </a:r>
+          </a:p>
+          <a:p/>
+          <a:p>
+            <a:r>
               <a:t>Если спросят, чем роль отличается от второй сессии по существу: тремя вещами, и все три на схеме. Итог возвращается сам, в тот контекст, где лежит работа. Поведение роли задано файлом, поэтому второй вызов повторяет первый. И права роли можно урезать списком — у второй сессии списка прав нет.</a:t>
             </a:r>
           </a:p>
           <a:p/>
           <a:p>
             <a:r>
+              <a:t>Если спросят, зачем повторять верхний ярус, если его считали в блоке MCP: затем, что следующий ярус читается только рядом с ним — контекст роли собран из тех же статей, и видно это, только когда обе картинки стоят на одном экране.</a:t>
+            </a:r>
+          </a:p>
+          <a:p/>
+          <a:p>
+            <a:r>
               <a:t>Если спросят, почему полосы верхнего яруса одинаковой ширины: потому что измеренной доли у нас нет. Постоянную плату за подключённые серверы занятие измерило в прошлом блоке, в токенах; остальные три источника на выборке никто не мерил. Нарисовать шкалу с долями было бы проще и было бы враньём.</a:t>
             </a:r>
           </a:p>
@@ -1512,12 +1524,6 @@
           <a:p>
             <a:r>
               <a:t>Если спросят, кто решает, звать роль по имени или дать модели выбрать самой: оба способа реальны, и устройство вызова — следующий экран целиком. Явный вызов снимает вопрос маршрутизации; выбор моделью зависит от того, насколько точно описание роли называет задачу.</a:t>
-            </a:r>
-          </a:p>
-          <a:p/>
-          <a:p>
-            <a:r>
-              <a:t>Если спросят про исключение «форк»: есть режим, который наследует всё целиком — тот же промпт, те же права, всю переписку. Изоляции контекста у него нет вовсе, и в наших сценах мы им не пользуемся; путать его с обычным вызовом роли не стоит.</a:t>
             </a:r>
           </a:p>
           <a:p/>
@@ -1677,7 +1683,7 @@
           <a:p/>
           <a:p>
             <a:r>
-              <a:t>Выход, блок четвёртый: только итог. Промежуточные вызовы родителю не видны, канал односторонний.</a:t>
+              <a:t>Выход, блок четвёртый: только итог. Промежуточные вызовы вызвавшей сессии не видны, канал односторонний.</a:t>
             </a:r>
           </a:p>
           <a:p/>
@@ -1707,7 +1713,7 @@
           <a:p/>
           <a:p>
             <a:r>
-              <a:t>Если спросят, чего физически нет на входе: истории переписки, файлов, которые уже прочитал родитель, и автопамяти основной сессии. Это свойство устройства, не дисциплина автора роли — канала для них попросту нет. По той же причине родитель не видит промежуточных действий: задача передаётся один раз, итог возвращается один раз, диалога между ними не бывает.</a:t>
+              <a:t>Если спросят, чего физически нет на входе: истории переписки, файлов, которые уже прочитал агент вызвавшей сессии, и её автопамяти. Это свойство устройства, не дисциплина автора роли — канала для них попросту нет. По той же причине агент не видит промежуточных действий роли: задача передаётся один раз, итог возвращается один раз, диалога между ними не бывает.</a:t>
             </a:r>
           </a:p>
           <a:p/>
@@ -6814,8 +6820,8 @@
         </p:blipFill>
         <p:spPr>
           <a:xfrm>
-            <a:off x="502920" y="1934029"/>
-            <a:ext cx="11183112" cy="2907609"/>
+            <a:off x="502920" y="966689"/>
+            <a:ext cx="11183112" cy="5325957"/>
           </a:xfrm>
           <a:prstGeom prst="rect">
             <a:avLst/>
@@ -7987,7 +7993,7 @@
                 </a:solidFill>
                 <a:latin typeface="Arial"/>
               </a:rPr>
-              <a:t> Встроенных инструментов было 40, оставили 13 ядра — и замерили: успешность на двух наборах задач выросла на 2–5 процентных пункта. Предел площадки — 128 инструментов на запрос (GitHub, инженерный блог, 19.11.2025).</a:t>
+              <a:t> Встроенных инструментов было 40, оставили 13 основных — и замерили: успешность на двух наборах задач выросла на 2–5 процентных пунктов. Предел площадки — 128 инструментов на запрос (GitHub, инженерный блог, 19.11.2025).</a:t>
             </a:r>
           </a:p>
         </p:txBody>
@@ -8516,7 +8522,7 @@
                 </a:solidFill>
                 <a:latin typeface="Arial"/>
               </a:rPr>
-              <a:t>сервер нужен в большинстве сессий этого проекта, а не одному человеку под одну задачу</a:t>
+              <a:t>сервер нужен в большинстве сессий этого проекта: им пользуется команда</a:t>
             </a:r>
           </a:p>
         </p:txBody>
@@ -8593,7 +8599,7 @@
                 </a:solidFill>
                 <a:latin typeface="Arial"/>
               </a:rPr>
-              <a:t>описания его инструментов приходят по требованию — проверено, а не предположено</a:t>
+              <a:t>описания его инструментов приходят по требованию, и это проверено</a:t>
             </a:r>
           </a:p>
         </p:txBody>
@@ -8670,7 +8676,7 @@
                 </a:solidFill>
                 <a:latin typeface="Arial"/>
               </a:rPr>
-              <a:t>наборов инструментов у него столько, сколько нужно задаче, а не всё, что сервер умеет</a:t>
+              <a:t>наборов инструментов у него столько, сколько нужно задаче; остальное сервер держит выключенным</a:t>
             </a:r>
           </a:p>
         </p:txBody>
@@ -8956,7 +8962,7 @@
                 </a:solidFill>
                 <a:latin typeface="Arial"/>
               </a:rPr>
-              <a:t>считать, что большой контекст снимает вопрос: точность выбора инструмента падает после 30–50 доступных, и это видно по результату, а не по счёту</a:t>
+              <a:t>считать, что большой контекст снимает вопрос: точность выбора инструмента падает после 30–50 доступных, и видно это по результату: счёт молчит</a:t>
             </a:r>
           </a:p>
         </p:txBody>
